--- a/examples/attention_is_all_you_need/slides.pptx
+++ b/examples/attention_is_all_you_need/slides.pptx
@@ -18,6 +18,7 @@
     <p:sldId id="266" r:id="rId17"/>
     <p:sldId id="267" r:id="rId18"/>
     <p:sldId id="268" r:id="rId19"/>
+    <p:sldId id="269" r:id="rId20"/>
   </p:sldIdLst>
   <p:sldSz cx="12191695" cy="6858000" type="screen4x3"/>
   <p:notesSz cx="6858000" cy="9144000"/>
@@ -3289,7 +3290,7 @@
               </a:defRPr>
             </a:pPr>
             <a:r>
-              <a:t>模型变体消融分析</a:t>
+              <a:t>机器翻译实验结果</a:t>
             </a:r>
           </a:p>
         </p:txBody>
@@ -3327,7 +3328,7 @@
               </a:defRPr>
             </a:pPr>
             <a:r>
-              <a:t>  注意力头数：8头最优，过多或过少均降低性能</a:t>
+              <a:t>  English-German: 28.4 BLEU (state-of-the-art)</a:t>
             </a:r>
           </a:p>
           <a:p>
@@ -3342,7 +3343,7 @@
               </a:defRPr>
             </a:pPr>
             <a:r>
-              <a:t>  键维度dk：更大尺寸的键可提高兼容性判断准确性</a:t>
+              <a:t>  English-French: 41.8 BLEU (state-of-the-art)</a:t>
             </a:r>
           </a:p>
           <a:p>
@@ -3357,7 +3358,7 @@
               </a:defRPr>
             </a:pPr>
             <a:r>
-              <a:t>  模型规模：更大的模型和更深层带来更好的困惑度和BLEU</a:t>
+              <a:t>  比此前最佳模型提升超过2 BLEU</a:t>
             </a:r>
           </a:p>
           <a:p>
@@ -3372,7 +3373,7 @@
               </a:defRPr>
             </a:pPr>
             <a:r>
-              <a:t>  Dropout：Pdrop=0.1有效防止过拟合</a:t>
+              <a:t>  训练成本仅为最佳模型的1/4</a:t>
             </a:r>
           </a:p>
           <a:p>
@@ -3387,7 +3388,7 @@
               </a:defRPr>
             </a:pPr>
             <a:r>
-              <a:t>  位置编码：正弦编码与可学习编码效果相近</a:t>
+              <a:t>  基础模型也超越所有此前发布的单模型</a:t>
             </a:r>
           </a:p>
         </p:txBody>
@@ -3526,7 +3527,7 @@
               </a:defRPr>
             </a:pPr>
             <a:r>
-              <a:t>泛化能力： constituency句法分析</a:t>
+              <a:t>模型变种与消融分析</a:t>
             </a:r>
           </a:p>
         </p:txBody>
@@ -3564,7 +3565,7 @@
               </a:defRPr>
             </a:pPr>
             <a:r>
-              <a:t>  验证Transformer可迁移到其他NLP任务</a:t>
+              <a:t>  多头注意力中，头数过多或过少都会降低性能</a:t>
             </a:r>
           </a:p>
           <a:p>
@@ -3579,7 +3580,7 @@
               </a:defRPr>
             </a:pPr>
             <a:r>
-              <a:t>  WSJ数据集仅40K句子训练：91.3 F1，超越BerkeleyParser</a:t>
+              <a:t>  减小attention key维度会损害模型质量</a:t>
             </a:r>
           </a:p>
           <a:p>
@@ -3594,7 +3595,7 @@
               </a:defRPr>
             </a:pPr>
             <a:r>
-              <a:t>  半监督设置(17M句子)：92.7 F1，接近最好成绩</a:t>
+              <a:t>  更大的模型和适当的dropout有助于性能提升</a:t>
             </a:r>
           </a:p>
           <a:p>
@@ -3609,7 +3610,7 @@
               </a:defRPr>
             </a:pPr>
             <a:r>
-              <a:t>  无任务特定调优即可取得优异表现</a:t>
+              <a:t>  位置编码：正弦编码与学习编码效果相当</a:t>
             </a:r>
           </a:p>
           <a:p>
@@ -3624,7 +3625,7 @@
               </a:defRPr>
             </a:pPr>
             <a:r>
-              <a:t>  证明纯注意力架构的泛化性和鲁棒性</a:t>
+              <a:t>  模型深度增加显著提升BLEU分数</a:t>
             </a:r>
           </a:p>
         </p:txBody>
@@ -3741,8 +3742,8 @@
         </p:nvSpPr>
         <p:spPr>
           <a:xfrm>
-            <a:off x="548640" y="365760"/>
-            <a:ext cx="10972800" cy="822960"/>
+            <a:off x="548640" y="274320"/>
+            <a:ext cx="10972800" cy="731520"/>
           </a:xfrm>
           <a:prstGeom prst="rect">
             <a:avLst/>
@@ -3756,14 +3757,14 @@
           <a:lstStyle/>
           <a:p>
             <a:pPr>
-              <a:defRPr sz="2800" b="1">
+              <a:defRPr sz="2600" b="1">
                 <a:solidFill>
                   <a:srgbClr val="1A3C6E"/>
                 </a:solidFill>
               </a:defRPr>
             </a:pPr>
             <a:r>
-              <a:t>总结与展望</a:t>
+              <a:t>泛化能力：英文 constituency 解析</a:t>
             </a:r>
           </a:p>
         </p:txBody>
@@ -3776,8 +3777,8 @@
         </p:nvSpPr>
         <p:spPr>
           <a:xfrm>
-            <a:off x="731520" y="1463040"/>
-            <a:ext cx="10515600" cy="4572000"/>
+            <a:off x="548640" y="1280160"/>
+            <a:ext cx="5943600" cy="5029200"/>
           </a:xfrm>
           <a:prstGeom prst="rect">
             <a:avLst/>
@@ -3792,83 +3793,142 @@
           <a:p>
             <a:pPr>
               <a:spcAft>
-                <a:spcPts val="1200"/>
+                <a:spcPts val="1000"/>
               </a:spcAft>
-              <a:defRPr sz="1800">
+              <a:defRPr sz="1600">
                 <a:solidFill>
                   <a:srgbClr val="333333"/>
                 </a:solidFill>
               </a:defRPr>
             </a:pPr>
             <a:r>
-              <a:t>  Transformer是首个完全基于注意力机制的序列转导模型</a:t>
+              <a:t>  仅用WSJ数据集(40K句子)训练即可超越Berkeley Parser</a:t>
             </a:r>
           </a:p>
           <a:p>
             <a:pPr>
               <a:spcAft>
-                <a:spcPts val="1200"/>
+                <a:spcPts val="1000"/>
               </a:spcAft>
-              <a:defRPr sz="1800">
+              <a:defRPr sz="1600">
                 <a:solidFill>
                   <a:srgbClr val="333333"/>
                 </a:solidFill>
               </a:defRPr>
             </a:pPr>
             <a:r>
-              <a:t>  训练速度大幅提升，支持高度并行化计算</a:t>
+              <a:t>  半监督设置下达到92.7 F1分数</a:t>
             </a:r>
           </a:p>
           <a:p>
             <a:pPr>
               <a:spcAft>
-                <a:spcPts val="1200"/>
+                <a:spcPts val="1000"/>
               </a:spcAft>
-              <a:defRPr sz="1800">
+              <a:defRPr sz="1600">
                 <a:solidFill>
                   <a:srgbClr val="333333"/>
                 </a:solidFill>
               </a:defRPr>
             </a:pPr>
             <a:r>
-              <a:t>  在翻译任务上达到新的最优性能，并展示良好泛化能力</a:t>
+              <a:t>  证明Transformer具有强大的任务泛化能力</a:t>
             </a:r>
           </a:p>
           <a:p>
             <a:pPr>
               <a:spcAft>
-                <a:spcPts val="1200"/>
+                <a:spcPts val="1000"/>
               </a:spcAft>
-              <a:defRPr sz="1800">
+              <a:defRPr sz="1600">
                 <a:solidFill>
                   <a:srgbClr val="333333"/>
                 </a:solidFill>
               </a:defRPr>
             </a:pPr>
             <a:r>
-              <a:t>  未来方向：扩展到图像、音频、视频等其他模态</a:t>
+              <a:t>  输出结构化结果，无需任务特定的调参</a:t>
             </a:r>
           </a:p>
           <a:p>
             <a:pPr>
               <a:spcAft>
-                <a:spcPts val="1200"/>
+                <a:spcPts val="1000"/>
               </a:spcAft>
-              <a:defRPr sz="1800">
+              <a:defRPr sz="1600">
                 <a:solidFill>
                   <a:srgbClr val="333333"/>
                 </a:solidFill>
               </a:defRPr>
             </a:pPr>
             <a:r>
-              <a:t>  计划探索局部注意力机制和减少生成的顺序性</a:t>
-            </a:r>
-          </a:p>
-        </p:txBody>
-      </p:sp>
-      <p:sp>
-        <p:nvSpPr>
-          <p:cNvPr id="5" name="TextBox 4"/>
+              <a:t>  验证了模型对长距离依赖的有效建模</a:t>
+            </a:r>
+          </a:p>
+        </p:txBody>
+      </p:sp>
+      <p:pic>
+        <p:nvPicPr>
+          <p:cNvPr id="5" name="Picture 4" descr="fig3_p4.png"/>
+          <p:cNvPicPr>
+            <a:picLocks noChangeAspect="1"/>
+          </p:cNvPicPr>
+          <p:nvPr/>
+        </p:nvPicPr>
+        <p:blipFill>
+          <a:blip r:embed="rId2"/>
+          <a:stretch>
+            <a:fillRect/>
+          </a:stretch>
+        </p:blipFill>
+        <p:spPr>
+          <a:xfrm>
+            <a:off x="7941122" y="1280160"/>
+            <a:ext cx="2680076" cy="4114800"/>
+          </a:xfrm>
+          <a:prstGeom prst="rect">
+            <a:avLst/>
+          </a:prstGeom>
+        </p:spPr>
+      </p:pic>
+      <p:sp>
+        <p:nvSpPr>
+          <p:cNvPr id="6" name="TextBox 5"/>
+          <p:cNvSpPr txBox="1"/>
+          <p:nvPr/>
+        </p:nvSpPr>
+        <p:spPr>
+          <a:xfrm>
+            <a:off x="6858000" y="5669280"/>
+            <a:ext cx="4846320" cy="731520"/>
+          </a:xfrm>
+          <a:prstGeom prst="rect">
+            <a:avLst/>
+          </a:prstGeom>
+          <a:noFill/>
+        </p:spPr>
+        <p:txBody>
+          <a:bodyPr wrap="square">
+            <a:spAutoFit/>
+          </a:bodyPr>
+          <a:lstStyle/>
+          <a:p>
+            <a:pPr algn="ctr">
+              <a:defRPr sz="1000" i="1">
+                <a:solidFill>
+                  <a:srgbClr val="888888"/>
+                </a:solidFill>
+              </a:defRPr>
+            </a:pPr>
+            <a:r>
+              <a:t>An example of the attention mechanism following long-distance dependencies in the</a:t>
+            </a:r>
+          </a:p>
+        </p:txBody>
+      </p:sp>
+      <p:sp>
+        <p:nvSpPr>
+          <p:cNvPr id="7" name="TextBox 6"/>
           <p:cNvSpPr txBox="1"/>
           <p:nvPr/>
         </p:nvSpPr>
@@ -4000,7 +4060,7 @@
               </a:defRPr>
             </a:pPr>
             <a:r>
-              <a:t>关键参考文献</a:t>
+              <a:t>总结与展望</a:t>
             </a:r>
           </a:p>
         </p:txBody>
@@ -4038,7 +4098,7 @@
               </a:defRPr>
             </a:pPr>
             <a:r>
-              <a:t>  [1] Bahdanau et al. Neural machine translation by jointly learning to align and translate (ICLR 2015) - 注意力机制引入NMT</a:t>
+              <a:t>  Transformer是完全基于注意力机制的序列转导模型</a:t>
             </a:r>
           </a:p>
           <a:p>
@@ -4053,7 +4113,7 @@
               </a:defRPr>
             </a:pPr>
             <a:r>
-              <a:t>  [2] Hochreiter &amp; Schmidhuber. Long Short-Term Memory (Neural Computation 1997) - LSTM基础</a:t>
+              <a:t>  可并行化训练，显著缩短训练时间</a:t>
             </a:r>
           </a:p>
           <a:p>
@@ -4068,7 +4128,7 @@
               </a:defRPr>
             </a:pPr>
             <a:r>
-              <a:t>  [3] Sutskever et al. Sequence to sequence learning with neural networks (NIPS 2014) - Seq2Seq框架</a:t>
+              <a:t>  在翻译任务上达到新的最佳性能</a:t>
             </a:r>
           </a:p>
           <a:p>
@@ -4083,7 +4143,7 @@
               </a:defRPr>
             </a:pPr>
             <a:r>
-              <a:t>  [4] Cho et al. Learning phrase representations using RNN encoder-decoder (EMNLP 2014) - GRU与Encoder-Decoder</a:t>
+              <a:t>  未来方向：处理图像、音频等非文本模态</a:t>
             </a:r>
           </a:p>
           <a:p>
@@ -4098,7 +4158,7 @@
               </a:defRPr>
             </a:pPr>
             <a:r>
-              <a:t>  [5] Vaswani et al. Attention Is All You Need (NIPS 2017) - 本论文</a:t>
+              <a:t>  探索局部注意力机制以处理更长序列</a:t>
             </a:r>
           </a:p>
         </p:txBody>
@@ -4134,6 +4194,243 @@
             </a:pPr>
             <a:r>
               <a:t>13</a:t>
+            </a:r>
+          </a:p>
+        </p:txBody>
+      </p:sp>
+    </p:spTree>
+  </p:cSld>
+  <p:clrMapOvr>
+    <a:masterClrMapping/>
+  </p:clrMapOvr>
+</p:sld>
+</file>
+
+<file path=ppt/slides/slide14.xml><?xml version="1.0" encoding="utf-8"?>
+<p:sld xmlns:a="http://schemas.openxmlformats.org/drawingml/2006/main" xmlns:p="http://schemas.openxmlformats.org/presentationml/2006/main" xmlns:r="http://schemas.openxmlformats.org/officeDocument/2006/relationships">
+  <p:cSld>
+    <p:bg>
+      <p:bgPr>
+        <a:solidFill>
+          <a:srgbClr val="FFFFFF"/>
+        </a:solidFill>
+        <a:effectLst/>
+      </p:bgPr>
+    </p:bg>
+    <p:spTree>
+      <p:nvGrpSpPr>
+        <p:cNvPr id="1" name=""/>
+        <p:cNvGrpSpPr/>
+        <p:nvPr/>
+      </p:nvGrpSpPr>
+      <p:grpSpPr/>
+      <p:sp>
+        <p:nvSpPr>
+          <p:cNvPr id="2" name="Rectangle 1"/>
+          <p:cNvSpPr/>
+          <p:nvPr/>
+        </p:nvSpPr>
+        <p:spPr>
+          <a:xfrm>
+            <a:off x="0" y="0"/>
+            <a:ext cx="137160" cy="6858000"/>
+          </a:xfrm>
+          <a:prstGeom prst="rect">
+            <a:avLst/>
+          </a:prstGeom>
+          <a:solidFill>
+            <a:srgbClr val="2E75B6"/>
+          </a:solidFill>
+          <a:ln>
+            <a:noFill/>
+          </a:ln>
+        </p:spPr>
+        <p:style>
+          <a:lnRef idx="1">
+            <a:schemeClr val="accent1"/>
+          </a:lnRef>
+          <a:fillRef idx="3">
+            <a:schemeClr val="accent1"/>
+          </a:fillRef>
+          <a:effectRef idx="2">
+            <a:schemeClr val="accent1"/>
+          </a:effectRef>
+          <a:fontRef idx="minor">
+            <a:schemeClr val="lt1"/>
+          </a:fontRef>
+        </p:style>
+        <p:txBody>
+          <a:bodyPr rtlCol="0" anchor="ctr"/>
+          <a:lstStyle/>
+          <a:p>
+            <a:pPr algn="ctr"/>
+          </a:p>
+        </p:txBody>
+      </p:sp>
+      <p:sp>
+        <p:nvSpPr>
+          <p:cNvPr id="3" name="TextBox 2"/>
+          <p:cNvSpPr txBox="1"/>
+          <p:nvPr/>
+        </p:nvSpPr>
+        <p:spPr>
+          <a:xfrm>
+            <a:off x="548640" y="365760"/>
+            <a:ext cx="10972800" cy="822960"/>
+          </a:xfrm>
+          <a:prstGeom prst="rect">
+            <a:avLst/>
+          </a:prstGeom>
+          <a:noFill/>
+        </p:spPr>
+        <p:txBody>
+          <a:bodyPr wrap="square">
+            <a:spAutoFit/>
+          </a:bodyPr>
+          <a:lstStyle/>
+          <a:p>
+            <a:pPr>
+              <a:defRPr sz="2800" b="1">
+                <a:solidFill>
+                  <a:srgbClr val="1A3C6E"/>
+                </a:solidFill>
+              </a:defRPr>
+            </a:pPr>
+            <a:r>
+              <a:t>关键参考文献</a:t>
+            </a:r>
+          </a:p>
+        </p:txBody>
+      </p:sp>
+      <p:sp>
+        <p:nvSpPr>
+          <p:cNvPr id="4" name="TextBox 3"/>
+          <p:cNvSpPr txBox="1"/>
+          <p:nvPr/>
+        </p:nvSpPr>
+        <p:spPr>
+          <a:xfrm>
+            <a:off x="731520" y="1463040"/>
+            <a:ext cx="10515600" cy="4572000"/>
+          </a:xfrm>
+          <a:prstGeom prst="rect">
+            <a:avLst/>
+          </a:prstGeom>
+          <a:noFill/>
+        </p:spPr>
+        <p:txBody>
+          <a:bodyPr wrap="square">
+            <a:spAutoFit/>
+          </a:bodyPr>
+          <a:lstStyle/>
+          <a:p>
+            <a:pPr>
+              <a:spcAft>
+                <a:spcPts val="1200"/>
+              </a:spcAft>
+              <a:defRPr sz="1800">
+                <a:solidFill>
+                  <a:srgbClr val="333333"/>
+                </a:solidFill>
+              </a:defRPr>
+            </a:pPr>
+            <a:r>
+              <a:t>  [2] Bahdanau et al., Neural Machine Translation by Jointly Learning to Align and Translate, 2014</a:t>
+            </a:r>
+          </a:p>
+          <a:p>
+            <a:pPr>
+              <a:spcAft>
+                <a:spcPts val="1200"/>
+              </a:spcAft>
+              <a:defRPr sz="1800">
+                <a:solidFill>
+                  <a:srgbClr val="333333"/>
+                </a:solidFill>
+              </a:defRPr>
+            </a:pPr>
+            <a:r>
+              <a:t>  [9] Gehring et al., Convolutional Sequence to Sequence Learning, 2017</a:t>
+            </a:r>
+          </a:p>
+          <a:p>
+            <a:pPr>
+              <a:spcAft>
+                <a:spcPts val="1200"/>
+              </a:spcAft>
+              <a:defRPr sz="1800">
+                <a:solidFill>
+                  <a:srgbClr val="333333"/>
+                </a:solidFill>
+              </a:defRPr>
+            </a:pPr>
+            <a:r>
+              <a:t>  [18] Kalchbrenner et al., Neural Machine Translation in Linear Time, 2017</a:t>
+            </a:r>
+          </a:p>
+          <a:p>
+            <a:pPr>
+              <a:spcAft>
+                <a:spcPts val="1200"/>
+              </a:spcAft>
+              <a:defRPr sz="1800">
+                <a:solidFill>
+                  <a:srgbClr val="333333"/>
+                </a:solidFill>
+              </a:defRPr>
+            </a:pPr>
+            <a:r>
+              <a:t>  [35] Sutskever et al., Sequence to Sequence Learning with Neural Networks, 2014</a:t>
+            </a:r>
+          </a:p>
+          <a:p>
+            <a:pPr>
+              <a:spcAft>
+                <a:spcPts val="1200"/>
+              </a:spcAft>
+              <a:defRPr sz="1800">
+                <a:solidFill>
+                  <a:srgbClr val="333333"/>
+                </a:solidFill>
+              </a:defRPr>
+            </a:pPr>
+            <a:r>
+              <a:t>  [38] Wu et al., Google's Neural Machine Translation System, 2016</a:t>
+            </a:r>
+          </a:p>
+        </p:txBody>
+      </p:sp>
+      <p:sp>
+        <p:nvSpPr>
+          <p:cNvPr id="5" name="TextBox 4"/>
+          <p:cNvSpPr txBox="1"/>
+          <p:nvPr/>
+        </p:nvSpPr>
+        <p:spPr>
+          <a:xfrm>
+            <a:off x="10972800" y="6400800"/>
+            <a:ext cx="914400" cy="365760"/>
+          </a:xfrm>
+          <a:prstGeom prst="rect">
+            <a:avLst/>
+          </a:prstGeom>
+          <a:noFill/>
+        </p:spPr>
+        <p:txBody>
+          <a:bodyPr wrap="none">
+            <a:spAutoFit/>
+          </a:bodyPr>
+          <a:lstStyle/>
+          <a:p>
+            <a:pPr algn="r">
+              <a:defRPr sz="1000">
+                <a:solidFill>
+                  <a:srgbClr val="999999"/>
+                </a:solidFill>
+              </a:defRPr>
+            </a:pPr>
+            <a:r>
+              <a:t>14</a:t>
             </a:r>
           </a:p>
         </p:txBody>
@@ -4275,7 +4572,7 @@
               </a:defRPr>
             </a:pPr>
             <a:r>
-              <a:t>  循环神经网络(LSTM、GRU)是序列建模的主流方法</a:t>
+              <a:t>  RNN、LSTM和GRU是序列建模的主流方法</a:t>
             </a:r>
           </a:p>
           <a:p>
@@ -4290,7 +4587,7 @@
               </a:defRPr>
             </a:pPr>
             <a:r>
-              <a:t>  循环计算沿符号位置分解，无法并行化，限制长序列训练效率</a:t>
+              <a:t>  RNN的顺序计算特性限制了并行化能力</a:t>
             </a:r>
           </a:p>
           <a:p>
@@ -4305,7 +4602,7 @@
               </a:defRPr>
             </a:pPr>
             <a:r>
-              <a:t>  长距离依赖学习困难，需穿越O(n)路径才能建立联系</a:t>
+              <a:t>  序列越长，内存约束越严重，批处理困难</a:t>
             </a:r>
           </a:p>
           <a:p>
@@ -4320,7 +4617,7 @@
               </a:defRPr>
             </a:pPr>
             <a:r>
-              <a:t>  注意力机制可建模任意距离依赖，但通常与RNN结合使用</a:t>
+              <a:t>  注意力机制可建模任意距离的依赖关系</a:t>
             </a:r>
           </a:p>
           <a:p>
@@ -4335,7 +4632,7 @@
               </a:defRPr>
             </a:pPr>
             <a:r>
-              <a:t>  本研究目标：用纯注意力机制替代循环，完全消除顺序计算瓶颈</a:t>
+              <a:t>  现有模型将注意力与RNN结合，非纯注意力架构</a:t>
             </a:r>
           </a:p>
         </p:txBody>
@@ -4512,7 +4809,7 @@
               </a:defRPr>
             </a:pPr>
             <a:r>
-              <a:t>  Extended Neural GPU、ByteNet、ConvS2S使用CNN并行计算隐藏表示</a:t>
+              <a:t>  ByteNet和ConvS2S使用卷积实现并行计算</a:t>
             </a:r>
           </a:p>
           <a:p>
@@ -4527,7 +4824,7 @@
               </a:defRPr>
             </a:pPr>
             <a:r>
-              <a:t>  卷积模型连接任意位置的操作数随距离线性或对数增长</a:t>
+              <a:t>  但连接任意位置的操作数随距离线性或对数增长</a:t>
             </a:r>
           </a:p>
           <a:p>
@@ -4542,7 +4839,7 @@
               </a:defRPr>
             </a:pPr>
             <a:r>
-              <a:t>  自注意力机制已成功用于阅读理解、摘要、文本蕴含等任务</a:t>
+              <a:t>  Self-attention已用于阅读理解、摘要等任务</a:t>
             </a:r>
           </a:p>
           <a:p>
@@ -4557,7 +4854,7 @@
               </a:defRPr>
             </a:pPr>
             <a:r>
-              <a:t>  端到端记忆网络基于注意力机制而非序列对齐的循环</a:t>
+              <a:t>  端到端记忆网络基于注意力而非时序循环</a:t>
             </a:r>
           </a:p>
           <a:p>
@@ -4572,7 +4869,7 @@
               </a:defRPr>
             </a:pPr>
             <a:r>
-              <a:t>  本文首次提出完全基于自注意力的序列转导模型</a:t>
+              <a:t>  Transformer是首个完全基于自注意力的模型</a:t>
             </a:r>
           </a:p>
         </p:txBody>
@@ -4689,8 +4986,8 @@
         </p:nvSpPr>
         <p:spPr>
           <a:xfrm>
-            <a:off x="548640" y="365760"/>
-            <a:ext cx="10972800" cy="822960"/>
+            <a:off x="548640" y="274320"/>
+            <a:ext cx="10972800" cy="731520"/>
           </a:xfrm>
           <a:prstGeom prst="rect">
             <a:avLst/>
@@ -4704,14 +5001,14 @@
           <a:lstStyle/>
           <a:p>
             <a:pPr>
-              <a:defRPr sz="2800" b="1">
+              <a:defRPr sz="2600" b="1">
                 <a:solidFill>
                   <a:srgbClr val="1A3C6E"/>
                 </a:solidFill>
               </a:defRPr>
             </a:pPr>
             <a:r>
-              <a:t>模型架构概述</a:t>
+              <a:t>Transformer 架构概览</a:t>
             </a:r>
           </a:p>
         </p:txBody>
@@ -4724,8 +5021,8 @@
         </p:nvSpPr>
         <p:spPr>
           <a:xfrm>
-            <a:off x="731520" y="1463040"/>
-            <a:ext cx="10515600" cy="4572000"/>
+            <a:off x="548640" y="1280160"/>
+            <a:ext cx="5943600" cy="5029200"/>
           </a:xfrm>
           <a:prstGeom prst="rect">
             <a:avLst/>
@@ -4740,83 +5037,142 @@
           <a:p>
             <a:pPr>
               <a:spcAft>
-                <a:spcPts val="1200"/>
+                <a:spcPts val="1000"/>
               </a:spcAft>
-              <a:defRPr sz="1800">
+              <a:defRPr sz="1600">
                 <a:solidFill>
                   <a:srgbClr val="333333"/>
                 </a:solidFill>
               </a:defRPr>
             </a:pPr>
             <a:r>
-              <a:t>  采用编码器-解码器(Encoder-Decoder)结构</a:t>
+              <a:t>  采用标准的Encoder-Decoder结构</a:t>
             </a:r>
           </a:p>
           <a:p>
             <a:pPr>
               <a:spcAft>
-                <a:spcPts val="1200"/>
+                <a:spcPts val="1000"/>
               </a:spcAft>
-              <a:defRPr sz="1800">
+              <a:defRPr sz="1600">
                 <a:solidFill>
                   <a:srgbClr val="333333"/>
                 </a:solidFill>
               </a:defRPr>
             </a:pPr>
             <a:r>
-              <a:t>  编码器：6层相同结构堆叠，每层包含多头自注意力和前馈网络</a:t>
+              <a:t>  完全基于注意力机制，摒弃循环和卷积</a:t>
             </a:r>
           </a:p>
           <a:p>
             <a:pPr>
               <a:spcAft>
-                <a:spcPts val="1200"/>
+                <a:spcPts val="1000"/>
               </a:spcAft>
-              <a:defRPr sz="1800">
+              <a:defRPr sz="1600">
                 <a:solidFill>
                   <a:srgbClr val="333333"/>
                 </a:solidFill>
               </a:defRPr>
             </a:pPr>
             <a:r>
-              <a:t>  解码器：同样6层，含额外注意力层连接编码器输出</a:t>
+              <a:t>  堆叠6层相同的Encoder和Decoder模块</a:t>
             </a:r>
           </a:p>
           <a:p>
             <a:pPr>
               <a:spcAft>
-                <a:spcPts val="1200"/>
+                <a:spcPts val="1000"/>
               </a:spcAft>
-              <a:defRPr sz="1800">
+              <a:defRPr sz="1600">
                 <a:solidFill>
                   <a:srgbClr val="333333"/>
                 </a:solidFill>
               </a:defRPr>
             </a:pPr>
             <a:r>
-              <a:t>  使用残差连接和层归一化(Layer Normalization)</a:t>
+              <a:t>  每个子层使用残差连接和层归一化</a:t>
             </a:r>
           </a:p>
           <a:p>
             <a:pPr>
               <a:spcAft>
-                <a:spcPts val="1200"/>
+                <a:spcPts val="1000"/>
               </a:spcAft>
-              <a:defRPr sz="1800">
+              <a:defRPr sz="1600">
                 <a:solidFill>
                   <a:srgbClr val="333333"/>
                 </a:solidFill>
               </a:defRPr>
             </a:pPr>
             <a:r>
-              <a:t>  所有子层输出维度统一为dmodel=512</a:t>
-            </a:r>
-          </a:p>
-        </p:txBody>
-      </p:sp>
-      <p:sp>
-        <p:nvSpPr>
-          <p:cNvPr id="5" name="TextBox 4"/>
+              <a:t>  所有子层输出维度 dmodel = 512</a:t>
+            </a:r>
+          </a:p>
+        </p:txBody>
+      </p:sp>
+      <p:pic>
+        <p:nvPicPr>
+          <p:cNvPr id="5" name="Picture 4" descr="fig1_p3.png"/>
+          <p:cNvPicPr>
+            <a:picLocks noChangeAspect="1"/>
+          </p:cNvPicPr>
+          <p:nvPr/>
+        </p:nvPicPr>
+        <p:blipFill>
+          <a:blip r:embed="rId2"/>
+          <a:stretch>
+            <a:fillRect/>
+          </a:stretch>
+        </p:blipFill>
+        <p:spPr>
+          <a:xfrm>
+            <a:off x="7884444" y="1280160"/>
+            <a:ext cx="2793432" cy="4114800"/>
+          </a:xfrm>
+          <a:prstGeom prst="rect">
+            <a:avLst/>
+          </a:prstGeom>
+        </p:spPr>
+      </p:pic>
+      <p:sp>
+        <p:nvSpPr>
+          <p:cNvPr id="6" name="TextBox 5"/>
+          <p:cNvSpPr txBox="1"/>
+          <p:nvPr/>
+        </p:nvSpPr>
+        <p:spPr>
+          <a:xfrm>
+            <a:off x="6858000" y="5669280"/>
+            <a:ext cx="4846320" cy="731520"/>
+          </a:xfrm>
+          <a:prstGeom prst="rect">
+            <a:avLst/>
+          </a:prstGeom>
+          <a:noFill/>
+        </p:spPr>
+        <p:txBody>
+          <a:bodyPr wrap="square">
+            <a:spAutoFit/>
+          </a:bodyPr>
+          <a:lstStyle/>
+          <a:p>
+            <a:pPr algn="ctr">
+              <a:defRPr sz="1000" i="1">
+                <a:solidFill>
+                  <a:srgbClr val="888888"/>
+                </a:solidFill>
+              </a:defRPr>
+            </a:pPr>
+            <a:r>
+              <a:t>The Transformer - model architecture.</a:t>
+            </a:r>
+          </a:p>
+        </p:txBody>
+      </p:sp>
+      <p:sp>
+        <p:nvSpPr>
+          <p:cNvPr id="7" name="TextBox 6"/>
           <p:cNvSpPr txBox="1"/>
           <p:nvPr/>
         </p:nvSpPr>
@@ -4926,8 +5282,8 @@
         </p:nvSpPr>
         <p:spPr>
           <a:xfrm>
-            <a:off x="548640" y="365760"/>
-            <a:ext cx="10972800" cy="822960"/>
+            <a:off x="548640" y="274320"/>
+            <a:ext cx="10972800" cy="731520"/>
           </a:xfrm>
           <a:prstGeom prst="rect">
             <a:avLst/>
@@ -4941,14 +5297,14 @@
           <a:lstStyle/>
           <a:p>
             <a:pPr>
-              <a:defRPr sz="2800" b="1">
+              <a:defRPr sz="2600" b="1">
                 <a:solidFill>
                   <a:srgbClr val="1A3C6E"/>
                 </a:solidFill>
               </a:defRPr>
             </a:pPr>
             <a:r>
-              <a:t>注意力机制：缩放点积注意力</a:t>
+              <a:t>注意力机制：Scaled Dot-Product Attention</a:t>
             </a:r>
           </a:p>
         </p:txBody>
@@ -4961,8 +5317,8 @@
         </p:nvSpPr>
         <p:spPr>
           <a:xfrm>
-            <a:off x="731520" y="1463040"/>
-            <a:ext cx="10515600" cy="4572000"/>
+            <a:off x="548640" y="1280160"/>
+            <a:ext cx="5943600" cy="5029200"/>
           </a:xfrm>
           <a:prstGeom prst="rect">
             <a:avLst/>
@@ -4977,83 +5333,142 @@
           <a:p>
             <a:pPr>
               <a:spcAft>
-                <a:spcPts val="1200"/>
+                <a:spcPts val="1000"/>
               </a:spcAft>
-              <a:defRPr sz="1800">
+              <a:defRPr sz="1600">
                 <a:solidFill>
                   <a:srgbClr val="333333"/>
                 </a:solidFill>
               </a:defRPr>
             </a:pPr>
             <a:r>
-              <a:t>  输入：查询向量Q、键向量K、值向量V</a:t>
+              <a:t>  输入：Query Q, Key K, Value V 三个向量</a:t>
             </a:r>
           </a:p>
           <a:p>
             <a:pPr>
               <a:spcAft>
-                <a:spcPts val="1200"/>
+                <a:spcPts val="1000"/>
               </a:spcAft>
-              <a:defRPr sz="1800">
+              <a:defRPr sz="1600">
                 <a:solidFill>
                   <a:srgbClr val="333333"/>
                 </a:solidFill>
               </a:defRPr>
             </a:pPr>
             <a:r>
-              <a:t>  计算：Attention(Q,K,V) = softmax(QKT/√dk)V</a:t>
+              <a:t>  计算Q与所有K的点积，除以√dk进行缩放</a:t>
             </a:r>
           </a:p>
           <a:p>
             <a:pPr>
               <a:spcAft>
-                <a:spcPts val="1200"/>
+                <a:spcPts val="1000"/>
               </a:spcAft>
-              <a:defRPr sz="1800">
+              <a:defRPr sz="1600">
                 <a:solidFill>
                   <a:srgbClr val="333333"/>
                 </a:solidFill>
               </a:defRPr>
             </a:pPr>
             <a:r>
-              <a:t>  除以√dk进行缩放，防止点积值过大导致梯度消失</a:t>
+              <a:t>  应用softmax获得注意力权重</a:t>
             </a:r>
           </a:p>
           <a:p>
             <a:pPr>
               <a:spcAft>
-                <a:spcPts val="1200"/>
+                <a:spcPts val="1000"/>
               </a:spcAft>
-              <a:defRPr sz="1800">
+              <a:defRPr sz="1600">
                 <a:solidFill>
                   <a:srgbClr val="333333"/>
                 </a:solidFill>
               </a:defRPr>
             </a:pPr>
             <a:r>
-              <a:t>  点积注意力比加性注意力速度更快、空间效率更高</a:t>
+              <a:t>  公式：Attention(Q,K,V) = softmax(QKT/√dk)V</a:t>
             </a:r>
           </a:p>
           <a:p>
             <a:pPr>
               <a:spcAft>
-                <a:spcPts val="1200"/>
+                <a:spcPts val="1000"/>
               </a:spcAft>
-              <a:defRPr sz="1800">
+              <a:defRPr sz="1600">
                 <a:solidFill>
                   <a:srgbClr val="333333"/>
                 </a:solidFill>
               </a:defRPr>
             </a:pPr>
             <a:r>
-              <a:t>  矩阵并行计算可利用高度优化的矩阵乘法代码</a:t>
-            </a:r>
-          </a:p>
-        </p:txBody>
-      </p:sp>
-      <p:sp>
-        <p:nvSpPr>
-          <p:cNvPr id="5" name="TextBox 4"/>
+              <a:t>  缩放因子防止点积过大导致梯度消失</a:t>
+            </a:r>
+          </a:p>
+        </p:txBody>
+      </p:sp>
+      <p:pic>
+        <p:nvPicPr>
+          <p:cNvPr id="5" name="Picture 4" descr="fig2_p4.png"/>
+          <p:cNvPicPr>
+            <a:picLocks noChangeAspect="1"/>
+          </p:cNvPicPr>
+          <p:nvPr/>
+        </p:nvPicPr>
+        <p:blipFill>
+          <a:blip r:embed="rId2"/>
+          <a:stretch>
+            <a:fillRect/>
+          </a:stretch>
+        </p:blipFill>
+        <p:spPr>
+          <a:xfrm>
+            <a:off x="8245478" y="1280160"/>
+            <a:ext cx="2071364" cy="4114800"/>
+          </a:xfrm>
+          <a:prstGeom prst="rect">
+            <a:avLst/>
+          </a:prstGeom>
+        </p:spPr>
+      </p:pic>
+      <p:sp>
+        <p:nvSpPr>
+          <p:cNvPr id="6" name="TextBox 5"/>
+          <p:cNvSpPr txBox="1"/>
+          <p:nvPr/>
+        </p:nvSpPr>
+        <p:spPr>
+          <a:xfrm>
+            <a:off x="6858000" y="5669280"/>
+            <a:ext cx="4846320" cy="731520"/>
+          </a:xfrm>
+          <a:prstGeom prst="rect">
+            <a:avLst/>
+          </a:prstGeom>
+          <a:noFill/>
+        </p:spPr>
+        <p:txBody>
+          <a:bodyPr wrap="square">
+            <a:spAutoFit/>
+          </a:bodyPr>
+          <a:lstStyle/>
+          <a:p>
+            <a:pPr algn="ctr">
+              <a:defRPr sz="1000" i="1">
+                <a:solidFill>
+                  <a:srgbClr val="888888"/>
+                </a:solidFill>
+              </a:defRPr>
+            </a:pPr>
+            <a:r>
+              <a:t>Multi-head attention allows the model to jointly attend to information from different representation</a:t>
+            </a:r>
+          </a:p>
+        </p:txBody>
+      </p:sp>
+      <p:sp>
+        <p:nvSpPr>
+          <p:cNvPr id="7" name="TextBox 6"/>
           <p:cNvSpPr txBox="1"/>
           <p:nvPr/>
         </p:nvSpPr>
@@ -5163,8 +5578,8 @@
         </p:nvSpPr>
         <p:spPr>
           <a:xfrm>
-            <a:off x="548640" y="365760"/>
-            <a:ext cx="10972800" cy="822960"/>
+            <a:off x="548640" y="274320"/>
+            <a:ext cx="10972800" cy="731520"/>
           </a:xfrm>
           <a:prstGeom prst="rect">
             <a:avLst/>
@@ -5178,14 +5593,14 @@
           <a:lstStyle/>
           <a:p>
             <a:pPr>
-              <a:defRPr sz="2800" b="1">
+              <a:defRPr sz="2600" b="1">
                 <a:solidFill>
                   <a:srgbClr val="1A3C6E"/>
                 </a:solidFill>
               </a:defRPr>
             </a:pPr>
             <a:r>
-              <a:t>多头注意力机制</a:t>
+              <a:t>多头注意力机制 (Multi-Head Attention)</a:t>
             </a:r>
           </a:p>
         </p:txBody>
@@ -5198,8 +5613,8 @@
         </p:nvSpPr>
         <p:spPr>
           <a:xfrm>
-            <a:off x="731520" y="1463040"/>
-            <a:ext cx="10515600" cy="4572000"/>
+            <a:off x="548640" y="1280160"/>
+            <a:ext cx="5943600" cy="5029200"/>
           </a:xfrm>
           <a:prstGeom prst="rect">
             <a:avLst/>
@@ -5214,54 +5629,54 @@
           <a:p>
             <a:pPr>
               <a:spcAft>
-                <a:spcPts val="1200"/>
+                <a:spcPts val="1000"/>
               </a:spcAft>
-              <a:defRPr sz="1800">
+              <a:defRPr sz="1600">
                 <a:solidFill>
                   <a:srgbClr val="333333"/>
                 </a:solidFill>
               </a:defRPr>
             </a:pPr>
             <a:r>
-              <a:t>  将Q、K、V投影h=8次到不同子空间(dk=dv=64)</a:t>
+              <a:t>  将Q、K、V投影到h个不同的子空间（h=8）</a:t>
             </a:r>
           </a:p>
           <a:p>
             <a:pPr>
               <a:spcAft>
-                <a:spcPts val="1200"/>
+                <a:spcPts val="1000"/>
               </a:spcAft>
-              <a:defRPr sz="1800">
+              <a:defRPr sz="1600">
                 <a:solidFill>
                   <a:srgbClr val="333333"/>
                 </a:solidFill>
               </a:defRPr>
             </a:pPr>
             <a:r>
-              <a:t>  各头并行计算注意力，最后拼接并线性投影</a:t>
+              <a:t>  每个头维度 dk = dv = dmodel/h = 64</a:t>
             </a:r>
           </a:p>
           <a:p>
             <a:pPr>
               <a:spcAft>
-                <a:spcPts val="1200"/>
+                <a:spcPts val="1000"/>
               </a:spcAft>
-              <a:defRPr sz="1800">
+              <a:defRPr sz="1600">
                 <a:solidFill>
                   <a:srgbClr val="333333"/>
                 </a:solidFill>
               </a:defRPr>
             </a:pPr>
             <a:r>
-              <a:t>  多头允许模型同时关注不同表示子空间的信息</a:t>
+              <a:t>  并行计算各头的注意力后拼接</a:t>
             </a:r>
           </a:p>
           <a:p>
             <a:pPr>
               <a:spcAft>
-                <a:spcPts val="1200"/>
+                <a:spcPts val="1000"/>
               </a:spcAft>
-              <a:defRPr sz="1800">
+              <a:defRPr sz="1600">
                 <a:solidFill>
                   <a:srgbClr val="333333"/>
                 </a:solidFill>
@@ -5274,23 +5689,82 @@
           <a:p>
             <a:pPr>
               <a:spcAft>
-                <a:spcPts val="1200"/>
+                <a:spcPts val="1000"/>
               </a:spcAft>
-              <a:defRPr sz="1800">
+              <a:defRPr sz="1600">
                 <a:solidFill>
                   <a:srgbClr val="333333"/>
                 </a:solidFill>
               </a:defRPr>
             </a:pPr>
             <a:r>
-              <a:t>  总计算量与单头全维度注意力相当</a:t>
-            </a:r>
-          </a:p>
-        </p:txBody>
-      </p:sp>
-      <p:sp>
-        <p:nvSpPr>
-          <p:cNvPr id="5" name="TextBox 4"/>
+              <a:t>  多头机制允许同时关注不同表示子空间的信息</a:t>
+            </a:r>
+          </a:p>
+        </p:txBody>
+      </p:sp>
+      <p:pic>
+        <p:nvPicPr>
+          <p:cNvPr id="5" name="Picture 4" descr="fig2_p4.png"/>
+          <p:cNvPicPr>
+            <a:picLocks noChangeAspect="1"/>
+          </p:cNvPicPr>
+          <p:nvPr/>
+        </p:nvPicPr>
+        <p:blipFill>
+          <a:blip r:embed="rId2"/>
+          <a:stretch>
+            <a:fillRect/>
+          </a:stretch>
+        </p:blipFill>
+        <p:spPr>
+          <a:xfrm>
+            <a:off x="8245478" y="1280160"/>
+            <a:ext cx="2071364" cy="4114800"/>
+          </a:xfrm>
+          <a:prstGeom prst="rect">
+            <a:avLst/>
+          </a:prstGeom>
+        </p:spPr>
+      </p:pic>
+      <p:sp>
+        <p:nvSpPr>
+          <p:cNvPr id="6" name="TextBox 5"/>
+          <p:cNvSpPr txBox="1"/>
+          <p:nvPr/>
+        </p:nvSpPr>
+        <p:spPr>
+          <a:xfrm>
+            <a:off x="6858000" y="5669280"/>
+            <a:ext cx="4846320" cy="731520"/>
+          </a:xfrm>
+          <a:prstGeom prst="rect">
+            <a:avLst/>
+          </a:prstGeom>
+          <a:noFill/>
+        </p:spPr>
+        <p:txBody>
+          <a:bodyPr wrap="square">
+            <a:spAutoFit/>
+          </a:bodyPr>
+          <a:lstStyle/>
+          <a:p>
+            <a:pPr algn="ctr">
+              <a:defRPr sz="1000" i="1">
+                <a:solidFill>
+                  <a:srgbClr val="888888"/>
+                </a:solidFill>
+              </a:defRPr>
+            </a:pPr>
+            <a:r>
+              <a:t>Multi-head attention allows the model to jointly attend to information from different representation</a:t>
+            </a:r>
+          </a:p>
+        </p:txBody>
+      </p:sp>
+      <p:sp>
+        <p:nvSpPr>
+          <p:cNvPr id="7" name="TextBox 6"/>
           <p:cNvSpPr txBox="1"/>
           <p:nvPr/>
         </p:nvSpPr>
@@ -5400,8 +5874,8 @@
         </p:nvSpPr>
         <p:spPr>
           <a:xfrm>
-            <a:off x="548640" y="365760"/>
-            <a:ext cx="10972800" cy="822960"/>
+            <a:off x="548640" y="274320"/>
+            <a:ext cx="10972800" cy="731520"/>
           </a:xfrm>
           <a:prstGeom prst="rect">
             <a:avLst/>
@@ -5415,14 +5889,14 @@
           <a:lstStyle/>
           <a:p>
             <a:pPr>
-              <a:defRPr sz="2800" b="1">
+              <a:defRPr sz="2600" b="1">
                 <a:solidFill>
                   <a:srgbClr val="1A3C6E"/>
                 </a:solidFill>
               </a:defRPr>
             </a:pPr>
             <a:r>
-              <a:t>位置编码与前馈网络</a:t>
+              <a:t>Transformer 中的三种注意力应用</a:t>
             </a:r>
           </a:p>
         </p:txBody>
@@ -5435,8 +5909,8 @@
         </p:nvSpPr>
         <p:spPr>
           <a:xfrm>
-            <a:off x="731520" y="1463040"/>
-            <a:ext cx="10515600" cy="4572000"/>
+            <a:off x="548640" y="1280160"/>
+            <a:ext cx="5943600" cy="5029200"/>
           </a:xfrm>
           <a:prstGeom prst="rect">
             <a:avLst/>
@@ -5451,83 +5925,142 @@
           <a:p>
             <a:pPr>
               <a:spcAft>
-                <a:spcPts val="1200"/>
+                <a:spcPts val="1000"/>
               </a:spcAft>
-              <a:defRPr sz="1800">
+              <a:defRPr sz="1600">
                 <a:solidFill>
                   <a:srgbClr val="333333"/>
                 </a:solidFill>
               </a:defRPr>
             </a:pPr>
             <a:r>
-              <a:t>  位置编码PE与词嵌入相加，注入序列位置信息</a:t>
+              <a:t>  Encoder Self-Attention: 所有K、V、Q来自同一位置</a:t>
             </a:r>
           </a:p>
           <a:p>
             <a:pPr>
               <a:spcAft>
-                <a:spcPts val="1200"/>
+                <a:spcPts val="1000"/>
               </a:spcAft>
-              <a:defRPr sz="1800">
+              <a:defRPr sz="1600">
                 <a:solidFill>
                   <a:srgbClr val="333333"/>
                 </a:solidFill>
               </a:defRPr>
             </a:pPr>
             <a:r>
-              <a:t>  使用正弦/余弦函数：波长从2π到10000·2π的几何级数</a:t>
+              <a:t>  Decoder Self-Attention: 防止看向后续位置（Masking）</a:t>
             </a:r>
           </a:p>
           <a:p>
             <a:pPr>
               <a:spcAft>
-                <a:spcPts val="1200"/>
+                <a:spcPts val="1000"/>
               </a:spcAft>
-              <a:defRPr sz="1800">
+              <a:defRPr sz="1600">
                 <a:solidFill>
                   <a:srgbClr val="333333"/>
                 </a:solidFill>
               </a:defRPr>
             </a:pPr>
             <a:r>
-              <a:t>  可学习相对位置表示，线性函数可表示固定偏移</a:t>
+              <a:t>  Encoder-Decoder Attention: Q来自Decoder，K、V来自Encoder</a:t>
             </a:r>
           </a:p>
           <a:p>
             <a:pPr>
               <a:spcAft>
-                <a:spcPts val="1200"/>
+                <a:spcPts val="1000"/>
               </a:spcAft>
-              <a:defRPr sz="1800">
+              <a:defRPr sz="1600">
                 <a:solidFill>
                   <a:srgbClr val="333333"/>
                 </a:solidFill>
               </a:defRPr>
             </a:pPr>
             <a:r>
-              <a:t>  前馈网络：两层线性变换，中间ReLU激活</a:t>
+              <a:t>  Decoder采用Masked Attention确保自回归特性</a:t>
             </a:r>
           </a:p>
           <a:p>
             <a:pPr>
               <a:spcAft>
-                <a:spcPts val="1200"/>
+                <a:spcPts val="1000"/>
               </a:spcAft>
-              <a:defRPr sz="1800">
+              <a:defRPr sz="1600">
                 <a:solidFill>
                   <a:srgbClr val="333333"/>
                 </a:solidFill>
               </a:defRPr>
             </a:pPr>
             <a:r>
-              <a:t>  FFN(x) = max(0, xW1 + b1)W2 + b2，内层维度dff=2048</a:t>
-            </a:r>
-          </a:p>
-        </p:txBody>
-      </p:sp>
-      <p:sp>
-        <p:nvSpPr>
-          <p:cNvPr id="5" name="TextBox 4"/>
+              <a:t>  实现了输入输出序列的全局依赖建模</a:t>
+            </a:r>
+          </a:p>
+        </p:txBody>
+      </p:sp>
+      <p:pic>
+        <p:nvPicPr>
+          <p:cNvPr id="5" name="Picture 4" descr="fig1_p3.png"/>
+          <p:cNvPicPr>
+            <a:picLocks noChangeAspect="1"/>
+          </p:cNvPicPr>
+          <p:nvPr/>
+        </p:nvPicPr>
+        <p:blipFill>
+          <a:blip r:embed="rId2"/>
+          <a:stretch>
+            <a:fillRect/>
+          </a:stretch>
+        </p:blipFill>
+        <p:spPr>
+          <a:xfrm>
+            <a:off x="7884444" y="1280160"/>
+            <a:ext cx="2793432" cy="4114800"/>
+          </a:xfrm>
+          <a:prstGeom prst="rect">
+            <a:avLst/>
+          </a:prstGeom>
+        </p:spPr>
+      </p:pic>
+      <p:sp>
+        <p:nvSpPr>
+          <p:cNvPr id="6" name="TextBox 5"/>
+          <p:cNvSpPr txBox="1"/>
+          <p:nvPr/>
+        </p:nvSpPr>
+        <p:spPr>
+          <a:xfrm>
+            <a:off x="6858000" y="5669280"/>
+            <a:ext cx="4846320" cy="731520"/>
+          </a:xfrm>
+          <a:prstGeom prst="rect">
+            <a:avLst/>
+          </a:prstGeom>
+          <a:noFill/>
+        </p:spPr>
+        <p:txBody>
+          <a:bodyPr wrap="square">
+            <a:spAutoFit/>
+          </a:bodyPr>
+          <a:lstStyle/>
+          <a:p>
+            <a:pPr algn="ctr">
+              <a:defRPr sz="1000" i="1">
+                <a:solidFill>
+                  <a:srgbClr val="888888"/>
+                </a:solidFill>
+              </a:defRPr>
+            </a:pPr>
+            <a:r>
+              <a:t>The Transformer - model architecture.</a:t>
+            </a:r>
+          </a:p>
+        </p:txBody>
+      </p:sp>
+      <p:sp>
+        <p:nvSpPr>
+          <p:cNvPr id="7" name="TextBox 6"/>
           <p:cNvSpPr txBox="1"/>
           <p:nvPr/>
         </p:nvSpPr>
@@ -5659,7 +6192,7 @@
               </a:defRPr>
             </a:pPr>
             <a:r>
-              <a:t>自注意力的优势分析</a:t>
+              <a:t>位置编码与前馈网络</a:t>
             </a:r>
           </a:p>
         </p:txBody>
@@ -5697,7 +6230,7 @@
               </a:defRPr>
             </a:pPr>
             <a:r>
-              <a:t>  自注意力：O(n²·d)复杂度，O(1)顺序操作，O(1)最大路径长度</a:t>
+              <a:t>  使用正弦/余弦函数生成位置编码</a:t>
             </a:r>
           </a:p>
           <a:p>
@@ -5712,7 +6245,7 @@
               </a:defRPr>
             </a:pPr>
             <a:r>
-              <a:t>  循环网络：O(n·d²)复杂度，O(n)顺序操作，O(n)路径长度</a:t>
+              <a:t>  PE(pos,2i) = sin(pos/100002i/dmodel)</a:t>
             </a:r>
           </a:p>
           <a:p>
@@ -5727,7 +6260,7 @@
               </a:defRPr>
             </a:pPr>
             <a:r>
-              <a:t>  卷积网络：O(k·n·d²)复杂度，O(1)顺序操作，O(logk(n))路径</a:t>
+              <a:t>  PE(pos,2i+1) = cos(pos/100002i/dmodel)</a:t>
             </a:r>
           </a:p>
           <a:p>
@@ -5742,7 +6275,7 @@
               </a:defRPr>
             </a:pPr>
             <a:r>
-              <a:t>  当序列长度n&lt;表示维度d时，自注意力更快</a:t>
+              <a:t>  前馈网络：FFN(x) = max(0, xW1+b1)W2+b2</a:t>
             </a:r>
           </a:p>
           <a:p>
@@ -5757,7 +6290,7 @@
               </a:defRPr>
             </a:pPr>
             <a:r>
-              <a:t>  常数路径长度有利于学习长距离依赖</a:t>
+              <a:t>  位置编码维度与词嵌入相同，可直接相加</a:t>
             </a:r>
           </a:p>
         </p:txBody>
@@ -5896,7 +6429,7 @@
               </a:defRPr>
             </a:pPr>
             <a:r>
-              <a:t>机器翻译实验结果</a:t>
+              <a:t>实验设置</a:t>
             </a:r>
           </a:p>
         </p:txBody>
@@ -5934,7 +6467,7 @@
               </a:defRPr>
             </a:pPr>
             <a:r>
-              <a:t>  WMT 2014 英德翻译：28.4 BLEU，超越所有先前模型(含集成)超过2 BLEU</a:t>
+              <a:t>  WMT 2014 English-German: 约450万句子对</a:t>
             </a:r>
           </a:p>
           <a:p>
@@ -5949,7 +6482,7 @@
               </a:defRPr>
             </a:pPr>
             <a:r>
-              <a:t>  WMT 2014 英法翻译：41.8 BLEU，新单模型最高分</a:t>
+              <a:t>  WMT 2014 English-French: 3600万句子对</a:t>
             </a:r>
           </a:p>
           <a:p>
@@ -5964,7 +6497,7 @@
               </a:defRPr>
             </a:pPr>
             <a:r>
-              <a:t>  训练成本：仅3.5天，8块P100 GPU</a:t>
+              <a:t>  使用Byte-pair Encoding (BPE) 进行分词</a:t>
             </a:r>
           </a:p>
           <a:p>
@@ -5979,7 +6512,7 @@
               </a:defRPr>
             </a:pPr>
             <a:r>
-              <a:t>  相比GNMT+RL模型，训练成本降低约1/4</a:t>
+              <a:t>  训练硬件：8块 NVIDIA P100 GPU</a:t>
             </a:r>
           </a:p>
           <a:p>
@@ -5994,7 +6527,7 @@
               </a:defRPr>
             </a:pPr>
             <a:r>
-              <a:t>  基础模型12小时(10万步)即可达到优异性能</a:t>
+              <a:t>  基础模型训练12小时，大模型训练3.5天</a:t>
             </a:r>
           </a:p>
         </p:txBody>
